--- a/assets/edwayspace_pres.pptx
+++ b/assets/edwayspace_pres.pptx
@@ -26,8 +26,12 @@
   <p:notesSz cx="5143500" cy="9144000"/>
   <p:embeddedFontLst>
     <p:embeddedFont>
+      <p:font typeface="Edwardian Script ITC" panose="030303020407070D0804" pitchFamily="66" charset="77"/>
+      <p:regular r:id="rId16"/>
+    </p:embeddedFont>
+    <p:embeddedFont>
       <p:font typeface="Racama" pitchFamily="2" charset="0"/>
-      <p:regular r:id="rId16"/>
+      <p:regular r:id="rId17"/>
     </p:embeddedFont>
   </p:embeddedFontLst>
   <p:defaultTextStyle>
@@ -2953,6 +2957,471 @@
                 <a:cs typeface="Calibri Light" pitchFamily="34" charset="-120"/>
               </a:rPr>
               <a:t>Обучение сотрудников</a:t>
+            </a:r>
+            <a:endParaRPr lang="en-US" sz="1100" dirty="0">
+              <a:latin typeface="Racama" pitchFamily="2" charset="0"/>
+            </a:endParaRPr>
+          </a:p>
+        </p:txBody>
+      </p:sp>
+      <p:sp>
+        <p:nvSpPr>
+          <p:cNvPr id="17" name="Shape 11"/>
+          <p:cNvSpPr/>
+          <p:nvPr/>
+        </p:nvSpPr>
+        <p:spPr>
+          <a:xfrm>
+            <a:off x="4754880" y="1371600"/>
+            <a:ext cx="3657600" cy="2926080"/>
+          </a:xfrm>
+          <a:prstGeom prst="rect">
+            <a:avLst/>
+          </a:prstGeom>
+          <a:solidFill>
+            <a:srgbClr val="1E1E1E"/>
+          </a:solidFill>
+          <a:ln w="6350">
+            <a:solidFill>
+              <a:srgbClr val="2A2A2A"/>
+            </a:solidFill>
+            <a:prstDash val="solid"/>
+          </a:ln>
+        </p:spPr>
+      </p:sp>
+      <p:sp>
+        <p:nvSpPr>
+          <p:cNvPr id="18" name="Text 12"/>
+          <p:cNvSpPr/>
+          <p:nvPr/>
+        </p:nvSpPr>
+        <p:spPr>
+          <a:xfrm>
+            <a:off x="4754880" y="1645920"/>
+            <a:ext cx="3657600" cy="457200"/>
+          </a:xfrm>
+          <a:prstGeom prst="rect">
+            <a:avLst/>
+          </a:prstGeom>
+          <a:noFill/>
+          <a:ln/>
+        </p:spPr>
+        <p:txBody>
+          <a:bodyPr wrap="square" lIns="0" tIns="0" rIns="0" bIns="0" rtlCol="0" anchor="ctr"/>
+          <a:lstStyle/>
+          <a:p>
+            <a:pPr marL="0" indent="0" algn="ctr">
+              <a:buNone/>
+            </a:pPr>
+            <a:r>
+              <a:rPr lang="en-US" sz="1600" b="1" dirty="0">
+                <a:solidFill>
+                  <a:srgbClr val="FFFFFF"/>
+                </a:solidFill>
+                <a:latin typeface="Calibri" pitchFamily="34" charset="0"/>
+                <a:ea typeface="Calibri" pitchFamily="34" charset="-122"/>
+                <a:cs typeface="Calibri" pitchFamily="34" charset="-120"/>
+              </a:rPr>
+              <a:t>Почему бесплатно?</a:t>
+            </a:r>
+            <a:endParaRPr lang="en-US" sz="1600" dirty="0"/>
+          </a:p>
+        </p:txBody>
+      </p:sp>
+      <p:sp>
+        <p:nvSpPr>
+          <p:cNvPr id="19" name="Text 13"/>
+          <p:cNvSpPr/>
+          <p:nvPr/>
+        </p:nvSpPr>
+        <p:spPr>
+          <a:xfrm>
+            <a:off x="5029200" y="2194560"/>
+            <a:ext cx="3200400" cy="1828800"/>
+          </a:xfrm>
+          <a:prstGeom prst="rect">
+            <a:avLst/>
+          </a:prstGeom>
+          <a:noFill/>
+          <a:ln/>
+        </p:spPr>
+        <p:txBody>
+          <a:bodyPr wrap="square" lIns="0" tIns="0" rIns="0" bIns="0" rtlCol="0" anchor="t"/>
+          <a:lstStyle/>
+          <a:p>
+            <a:pPr marL="0" indent="0" algn="ctr">
+              <a:buNone/>
+            </a:pPr>
+            <a:r>
+              <a:rPr lang="en-US" sz="1200" dirty="0">
+                <a:solidFill>
+                  <a:srgbClr val="8A8A8A"/>
+                </a:solidFill>
+                <a:latin typeface="Calibri Light" pitchFamily="34" charset="0"/>
+                <a:ea typeface="Calibri Light" pitchFamily="34" charset="-122"/>
+                <a:cs typeface="Calibri Light" pitchFamily="34" charset="-120"/>
+              </a:rPr>
+              <a:t>Нам важно протестировать платформу в реальных условиях. Вы получаете готовый инструмент, </a:t>
+            </a:r>
+            <a:r>
+              <a:rPr lang="ru-RU" sz="1200" dirty="0">
+                <a:solidFill>
+                  <a:srgbClr val="8A8A8A"/>
+                </a:solidFill>
+                <a:latin typeface="Calibri Light" pitchFamily="34" charset="0"/>
+                <a:ea typeface="Calibri Light" pitchFamily="34" charset="-122"/>
+                <a:cs typeface="Calibri Light" pitchFamily="34" charset="-120"/>
+              </a:rPr>
+              <a:t>а </a:t>
+            </a:r>
+            <a:r>
+              <a:rPr lang="en-US" sz="1200" dirty="0" err="1">
+                <a:solidFill>
+                  <a:srgbClr val="8A8A8A"/>
+                </a:solidFill>
+                <a:latin typeface="Calibri Light" pitchFamily="34" charset="0"/>
+                <a:ea typeface="Calibri Light" pitchFamily="34" charset="-122"/>
+                <a:cs typeface="Calibri Light" pitchFamily="34" charset="-120"/>
+              </a:rPr>
+              <a:t>мы</a:t>
+            </a:r>
+            <a:r>
+              <a:rPr lang="en-US" sz="1200" dirty="0">
+                <a:solidFill>
+                  <a:srgbClr val="8A8A8A"/>
+                </a:solidFill>
+                <a:latin typeface="Calibri Light" pitchFamily="34" charset="0"/>
+                <a:ea typeface="Calibri Light" pitchFamily="34" charset="-122"/>
+                <a:cs typeface="Calibri Light" pitchFamily="34" charset="-120"/>
+              </a:rPr>
+              <a:t> - обратную связь для развития продукта. Все </a:t>
+            </a:r>
+            <a:r>
+              <a:rPr lang="en-US" sz="1200" dirty="0" err="1">
+                <a:solidFill>
+                  <a:srgbClr val="8A8A8A"/>
+                </a:solidFill>
+                <a:latin typeface="Calibri Light" pitchFamily="34" charset="0"/>
+                <a:ea typeface="Calibri Light" pitchFamily="34" charset="-122"/>
+                <a:cs typeface="Calibri Light" pitchFamily="34" charset="-120"/>
+              </a:rPr>
+              <a:t>в</a:t>
+            </a:r>
+            <a:r>
+              <a:rPr lang="en-US" sz="1200" dirty="0">
+                <a:solidFill>
+                  <a:srgbClr val="8A8A8A"/>
+                </a:solidFill>
+                <a:latin typeface="Calibri Light" pitchFamily="34" charset="0"/>
+                <a:ea typeface="Calibri Light" pitchFamily="34" charset="-122"/>
+                <a:cs typeface="Calibri Light" pitchFamily="34" charset="-120"/>
+              </a:rPr>
+              <a:t> </a:t>
+            </a:r>
+            <a:r>
+              <a:rPr lang="ru-RU" sz="1200" dirty="0">
+                <a:solidFill>
+                  <a:srgbClr val="8A8A8A"/>
+                </a:solidFill>
+                <a:latin typeface="Calibri Light" pitchFamily="34" charset="0"/>
+                <a:ea typeface="Calibri Light" pitchFamily="34" charset="-122"/>
+                <a:cs typeface="Calibri Light" pitchFamily="34" charset="-120"/>
+              </a:rPr>
+              <a:t>плюсе</a:t>
+            </a:r>
+            <a:endParaRPr lang="en-US" sz="1200" dirty="0">
+              <a:latin typeface="Edwardian Script ITC" panose="030303020407070D0804" pitchFamily="66" charset="77"/>
+            </a:endParaRPr>
+          </a:p>
+        </p:txBody>
+      </p:sp>
+      <p:sp>
+        <p:nvSpPr>
+          <p:cNvPr id="21" name="Shape 2">
+            <a:extLst>
+              <a:ext uri="{FF2B5EF4-FFF2-40B4-BE49-F238E27FC236}">
+                <a16:creationId xmlns:a16="http://schemas.microsoft.com/office/drawing/2014/main" id="{FF4B466A-AE4F-8AED-D12C-496D42FF0FD6}"/>
+              </a:ext>
+            </a:extLst>
+          </p:cNvPr>
+          <p:cNvSpPr/>
+          <p:nvPr/>
+        </p:nvSpPr>
+        <p:spPr>
+          <a:xfrm>
+            <a:off x="4754880" y="1371600"/>
+            <a:ext cx="3657600" cy="2926080"/>
+          </a:xfrm>
+          <a:prstGeom prst="rect">
+            <a:avLst/>
+          </a:prstGeom>
+          <a:solidFill>
+            <a:srgbClr val="141414"/>
+          </a:solidFill>
+          <a:ln w="12700">
+            <a:solidFill>
+              <a:srgbClr val="0078D4"/>
+            </a:solidFill>
+            <a:prstDash val="solid"/>
+          </a:ln>
+        </p:spPr>
+      </p:sp>
+      <p:sp>
+        <p:nvSpPr>
+          <p:cNvPr id="22" name="Shape 3">
+            <a:extLst>
+              <a:ext uri="{FF2B5EF4-FFF2-40B4-BE49-F238E27FC236}">
+                <a16:creationId xmlns:a16="http://schemas.microsoft.com/office/drawing/2014/main" id="{56C42427-C94C-4FCC-FAE6-6666FD1D9B04}"/>
+              </a:ext>
+            </a:extLst>
+          </p:cNvPr>
+          <p:cNvSpPr/>
+          <p:nvPr/>
+        </p:nvSpPr>
+        <p:spPr>
+          <a:xfrm>
+            <a:off x="4754880" y="1371600"/>
+            <a:ext cx="54864" cy="2926080"/>
+          </a:xfrm>
+          <a:prstGeom prst="rect">
+            <a:avLst/>
+          </a:prstGeom>
+          <a:solidFill>
+            <a:srgbClr val="0078D4"/>
+          </a:solidFill>
+          <a:ln/>
+        </p:spPr>
+      </p:sp>
+      <p:sp>
+        <p:nvSpPr>
+          <p:cNvPr id="23" name="Text 4">
+            <a:extLst>
+              <a:ext uri="{FF2B5EF4-FFF2-40B4-BE49-F238E27FC236}">
+                <a16:creationId xmlns:a16="http://schemas.microsoft.com/office/drawing/2014/main" id="{9BE8EEFA-D897-0A54-FE8B-24B0C60BC477}"/>
+              </a:ext>
+            </a:extLst>
+          </p:cNvPr>
+          <p:cNvSpPr/>
+          <p:nvPr/>
+        </p:nvSpPr>
+        <p:spPr>
+          <a:xfrm>
+            <a:off x="4754880" y="1554480"/>
+            <a:ext cx="3657600" cy="320040"/>
+          </a:xfrm>
+          <a:prstGeom prst="rect">
+            <a:avLst/>
+          </a:prstGeom>
+          <a:noFill/>
+          <a:ln/>
+        </p:spPr>
+        <p:txBody>
+          <a:bodyPr wrap="square" lIns="0" tIns="0" rIns="0" bIns="0" rtlCol="0" anchor="ctr"/>
+          <a:lstStyle/>
+          <a:p>
+            <a:pPr marL="0" indent="0" algn="ctr">
+              <a:buNone/>
+            </a:pPr>
+            <a:r>
+              <a:rPr lang="ru-RU" sz="1100" b="1" kern="0" dirty="0">
+                <a:solidFill>
+                  <a:srgbClr val="0078D4"/>
+                </a:solidFill>
+                <a:latin typeface="Racama" pitchFamily="2" charset="0"/>
+                <a:cs typeface="Calibri" pitchFamily="34" charset="-120"/>
+              </a:rPr>
+              <a:t>РЕЛИЗ</a:t>
+            </a:r>
+            <a:endParaRPr lang="en-US" sz="1100" dirty="0">
+              <a:latin typeface="Racama" pitchFamily="2" charset="0"/>
+            </a:endParaRPr>
+          </a:p>
+        </p:txBody>
+      </p:sp>
+      <p:sp>
+        <p:nvSpPr>
+          <p:cNvPr id="24" name="Text 5">
+            <a:extLst>
+              <a:ext uri="{FF2B5EF4-FFF2-40B4-BE49-F238E27FC236}">
+                <a16:creationId xmlns:a16="http://schemas.microsoft.com/office/drawing/2014/main" id="{84544FD0-AE93-ACDF-3818-CC041BDCA6BC}"/>
+              </a:ext>
+            </a:extLst>
+          </p:cNvPr>
+          <p:cNvSpPr/>
+          <p:nvPr/>
+        </p:nvSpPr>
+        <p:spPr>
+          <a:xfrm>
+            <a:off x="4754880" y="1920240"/>
+            <a:ext cx="3657600" cy="640080"/>
+          </a:xfrm>
+          <a:prstGeom prst="rect">
+            <a:avLst/>
+          </a:prstGeom>
+          <a:noFill/>
+          <a:ln/>
+        </p:spPr>
+        <p:txBody>
+          <a:bodyPr wrap="square" lIns="0" tIns="0" rIns="0" bIns="0" rtlCol="0" anchor="ctr"/>
+          <a:lstStyle/>
+          <a:p>
+            <a:pPr marL="0" indent="0" algn="ctr">
+              <a:buNone/>
+            </a:pPr>
+            <a:r>
+              <a:rPr lang="ru-RU" sz="3200" b="1" dirty="0">
+                <a:solidFill>
+                  <a:srgbClr val="FFFFFF"/>
+                </a:solidFill>
+                <a:latin typeface="Racama" pitchFamily="2" charset="0"/>
+                <a:cs typeface="Calibri" pitchFamily="34" charset="-120"/>
+              </a:rPr>
+              <a:t>4 990 руб./мес.</a:t>
+            </a:r>
+            <a:endParaRPr lang="en-US" sz="3200" dirty="0">
+              <a:latin typeface="Racama" pitchFamily="2" charset="0"/>
+            </a:endParaRPr>
+          </a:p>
+        </p:txBody>
+      </p:sp>
+      <p:sp>
+        <p:nvSpPr>
+          <p:cNvPr id="25" name="Text 6">
+            <a:extLst>
+              <a:ext uri="{FF2B5EF4-FFF2-40B4-BE49-F238E27FC236}">
+                <a16:creationId xmlns:a16="http://schemas.microsoft.com/office/drawing/2014/main" id="{76CC093C-29FD-DC81-132F-3185C31B156A}"/>
+              </a:ext>
+            </a:extLst>
+          </p:cNvPr>
+          <p:cNvSpPr/>
+          <p:nvPr/>
+        </p:nvSpPr>
+        <p:spPr>
+          <a:xfrm>
+            <a:off x="4754880" y="2560320"/>
+            <a:ext cx="3657600" cy="365760"/>
+          </a:xfrm>
+          <a:prstGeom prst="rect">
+            <a:avLst/>
+          </a:prstGeom>
+          <a:noFill/>
+          <a:ln/>
+        </p:spPr>
+        <p:txBody>
+          <a:bodyPr wrap="square" lIns="0" tIns="0" rIns="0" bIns="0" rtlCol="0" anchor="ctr"/>
+          <a:lstStyle/>
+          <a:p>
+            <a:pPr marL="0" indent="0" algn="ctr">
+              <a:buNone/>
+            </a:pPr>
+            <a:r>
+              <a:rPr lang="en-US" sz="1300" dirty="0" err="1">
+                <a:solidFill>
+                  <a:srgbClr val="8A8A8A"/>
+                </a:solidFill>
+                <a:latin typeface="Racama" pitchFamily="2" charset="0"/>
+                <a:ea typeface="Calibri Light" pitchFamily="34" charset="-122"/>
+                <a:cs typeface="Calibri Light" pitchFamily="34" charset="-120"/>
+              </a:rPr>
+              <a:t>Для</a:t>
+            </a:r>
+            <a:r>
+              <a:rPr lang="en-US" sz="1300" dirty="0">
+                <a:solidFill>
+                  <a:srgbClr val="8A8A8A"/>
+                </a:solidFill>
+                <a:latin typeface="Racama" pitchFamily="2" charset="0"/>
+                <a:ea typeface="Calibri Light" pitchFamily="34" charset="-122"/>
+                <a:cs typeface="Calibri Light" pitchFamily="34" charset="-120"/>
+              </a:rPr>
+              <a:t> </a:t>
+            </a:r>
+            <a:r>
+              <a:rPr lang="ru-RU" sz="1300" dirty="0">
+                <a:solidFill>
+                  <a:srgbClr val="8A8A8A"/>
+                </a:solidFill>
+                <a:latin typeface="Racama" pitchFamily="2" charset="0"/>
+                <a:ea typeface="Calibri Light" pitchFamily="34" charset="-122"/>
+                <a:cs typeface="Calibri Light" pitchFamily="34" charset="-120"/>
+              </a:rPr>
+              <a:t>прочих школ</a:t>
+            </a:r>
+            <a:endParaRPr lang="en-US" sz="1300" dirty="0">
+              <a:latin typeface="Racama" pitchFamily="2" charset="0"/>
+            </a:endParaRPr>
+          </a:p>
+        </p:txBody>
+      </p:sp>
+      <p:pic>
+        <p:nvPicPr>
+          <p:cNvPr id="26" name="Image 0" descr="preencoded.png">
+            <a:extLst>
+              <a:ext uri="{FF2B5EF4-FFF2-40B4-BE49-F238E27FC236}">
+                <a16:creationId xmlns:a16="http://schemas.microsoft.com/office/drawing/2014/main" id="{756A539F-41D2-D903-5359-27E21A1C1A07}"/>
+              </a:ext>
+            </a:extLst>
+          </p:cNvPr>
+          <p:cNvPicPr>
+            <a:picLocks noChangeAspect="1"/>
+          </p:cNvPicPr>
+          <p:nvPr/>
+        </p:nvPicPr>
+        <p:blipFill>
+          <a:blip r:embed="rId3"/>
+          <a:stretch>
+            <a:fillRect/>
+          </a:stretch>
+        </p:blipFill>
+        <p:spPr>
+          <a:xfrm>
+            <a:off x="5120640" y="3081528"/>
+            <a:ext cx="201168" cy="201168"/>
+          </a:xfrm>
+          <a:prstGeom prst="rect">
+            <a:avLst/>
+          </a:prstGeom>
+        </p:spPr>
+      </p:pic>
+      <p:sp>
+        <p:nvSpPr>
+          <p:cNvPr id="27" name="Text 7">
+            <a:extLst>
+              <a:ext uri="{FF2B5EF4-FFF2-40B4-BE49-F238E27FC236}">
+                <a16:creationId xmlns:a16="http://schemas.microsoft.com/office/drawing/2014/main" id="{6A981DD7-F1A7-0598-F8BC-833ED690011F}"/>
+              </a:ext>
+            </a:extLst>
+          </p:cNvPr>
+          <p:cNvSpPr/>
+          <p:nvPr/>
+        </p:nvSpPr>
+        <p:spPr>
+          <a:xfrm>
+            <a:off x="5440680" y="3063240"/>
+            <a:ext cx="2743200" cy="274320"/>
+          </a:xfrm>
+          <a:prstGeom prst="rect">
+            <a:avLst/>
+          </a:prstGeom>
+          <a:noFill/>
+          <a:ln/>
+        </p:spPr>
+        <p:txBody>
+          <a:bodyPr wrap="square" lIns="0" tIns="0" rIns="0" bIns="0" rtlCol="0" anchor="ctr"/>
+          <a:lstStyle/>
+          <a:p>
+            <a:pPr marL="0" indent="0">
+              <a:buNone/>
+            </a:pPr>
+            <a:r>
+              <a:rPr lang="ru-RU" sz="1100" dirty="0">
+                <a:solidFill>
+                  <a:srgbClr val="8A8A8A"/>
+                </a:solidFill>
+                <a:latin typeface="Racama" pitchFamily="2" charset="0"/>
+                <a:cs typeface="Calibri Light" pitchFamily="34" charset="-120"/>
+              </a:rPr>
+              <a:t>Такие же преимущества, как в бете </a:t>
             </a:r>
             <a:endParaRPr lang="en-US" sz="1100" dirty="0">
               <a:latin typeface="Racama" pitchFamily="2" charset="0"/>
